--- a/chapter1/parts/part-01-introduction-to-datasets/clip.pptx
+++ b/chapter1/parts/part-01-introduction-to-datasets/clip.pptx
@@ -4186,10 +4186,12 @@
           </a:bodyPr>
           <a:lstStyle/>
           <a:p>
-            <a:pPr>
+            <a:pPr lvl="0" marL="457200" indent="-228600">
+              <a:buFont typeface="Calibri"/>
               <a:spcAft>
                 <a:spcPts val="1000"/>
               </a:spcAft>
+              <a:buSzPct val="100000"/>
               <a:buChar char="•"/>
               <a:lnSpc>
                 <a:spcPts val="2200"/>
@@ -4206,10 +4208,12 @@
             </a:r>
           </a:p>
           <a:p>
-            <a:pPr>
+            <a:pPr lvl="0" marL="457200" indent="-228600">
+              <a:buFont typeface="Calibri"/>
               <a:spcAft>
                 <a:spcPts val="1000"/>
               </a:spcAft>
+              <a:buSzPct val="100000"/>
               <a:buChar char="•"/>
               <a:lnSpc>
                 <a:spcPts val="2200"/>
@@ -4345,10 +4349,12 @@
           </a:bodyPr>
           <a:lstStyle/>
           <a:p>
-            <a:pPr>
+            <a:pPr lvl="0" marL="457200" indent="-228600">
+              <a:buFont typeface="Calibri"/>
               <a:spcAft>
                 <a:spcPts val="1000"/>
               </a:spcAft>
+              <a:buSzPct val="100000"/>
               <a:buChar char="•"/>
               <a:lnSpc>
                 <a:spcPts val="2200"/>
@@ -4365,10 +4371,12 @@
             </a:r>
           </a:p>
           <a:p>
-            <a:pPr>
+            <a:pPr lvl="0" marL="457200" indent="-228600">
+              <a:buFont typeface="Calibri"/>
               <a:spcAft>
                 <a:spcPts val="1000"/>
               </a:spcAft>
+              <a:buSzPct val="100000"/>
               <a:buChar char="•"/>
               <a:lnSpc>
                 <a:spcPts val="2200"/>
@@ -4385,10 +4393,12 @@
             </a:r>
           </a:p>
           <a:p>
-            <a:pPr>
+            <a:pPr lvl="0" marL="457200" indent="-228600">
+              <a:buFont typeface="Calibri"/>
               <a:spcAft>
                 <a:spcPts val="1000"/>
               </a:spcAft>
+              <a:buSzPct val="100000"/>
               <a:buChar char="•"/>
               <a:lnSpc>
                 <a:spcPts val="2200"/>
@@ -4524,10 +4534,12 @@
           </a:bodyPr>
           <a:lstStyle/>
           <a:p>
-            <a:pPr>
+            <a:pPr lvl="0" marL="457200" indent="-228600">
+              <a:buFont typeface="Calibri"/>
               <a:spcAft>
                 <a:spcPts val="1000"/>
               </a:spcAft>
+              <a:buSzPct val="100000"/>
               <a:buChar char="•"/>
               <a:lnSpc>
                 <a:spcPts val="2200"/>
@@ -4544,10 +4556,12 @@
             </a:r>
           </a:p>
           <a:p>
-            <a:pPr>
+            <a:pPr lvl="0" marL="457200" indent="-228600">
+              <a:buFont typeface="Calibri"/>
               <a:spcAft>
                 <a:spcPts val="1000"/>
               </a:spcAft>
+              <a:buSzPct val="100000"/>
               <a:buChar char="•"/>
               <a:lnSpc>
                 <a:spcPts val="2200"/>
@@ -4564,10 +4578,12 @@
             </a:r>
           </a:p>
           <a:p>
-            <a:pPr>
+            <a:pPr lvl="0" marL="457200" indent="-228600">
+              <a:buFont typeface="Calibri"/>
               <a:spcAft>
                 <a:spcPts val="1000"/>
               </a:spcAft>
+              <a:buSzPct val="100000"/>
               <a:buChar char="•"/>
               <a:lnSpc>
                 <a:spcPts val="2200"/>
@@ -4703,10 +4719,12 @@
           </a:bodyPr>
           <a:lstStyle/>
           <a:p>
-            <a:pPr>
+            <a:pPr lvl="0" marL="457200" indent="-228600">
+              <a:buFont typeface="Calibri"/>
               <a:spcAft>
                 <a:spcPts val="1000"/>
               </a:spcAft>
+              <a:buSzPct val="100000"/>
               <a:buChar char="•"/>
               <a:lnSpc>
                 <a:spcPts val="2200"/>
@@ -4723,10 +4741,12 @@
             </a:r>
           </a:p>
           <a:p>
-            <a:pPr>
+            <a:pPr lvl="0" marL="457200" indent="-228600">
+              <a:buFont typeface="Calibri"/>
               <a:spcAft>
                 <a:spcPts val="1000"/>
               </a:spcAft>
+              <a:buSzPct val="100000"/>
               <a:buChar char="•"/>
               <a:lnSpc>
                 <a:spcPts val="2200"/>
@@ -4743,10 +4763,12 @@
             </a:r>
           </a:p>
           <a:p>
-            <a:pPr>
+            <a:pPr lvl="0" marL="457200" indent="-228600">
+              <a:buFont typeface="Calibri"/>
               <a:spcAft>
                 <a:spcPts val="1000"/>
               </a:spcAft>
+              <a:buSzPct val="100000"/>
               <a:buChar char="•"/>
               <a:lnSpc>
                 <a:spcPts val="2200"/>
@@ -4882,10 +4904,12 @@
           </a:bodyPr>
           <a:lstStyle/>
           <a:p>
-            <a:pPr>
+            <a:pPr lvl="0" marL="457200" indent="-228600">
+              <a:buFont typeface="Calibri"/>
               <a:spcAft>
                 <a:spcPts val="1000"/>
               </a:spcAft>
+              <a:buSzPct val="100000"/>
               <a:buChar char="•"/>
               <a:lnSpc>
                 <a:spcPts val="2200"/>
@@ -4902,10 +4926,12 @@
             </a:r>
           </a:p>
           <a:p>
-            <a:pPr>
+            <a:pPr lvl="0" marL="457200" indent="-228600">
+              <a:buFont typeface="Calibri"/>
               <a:spcAft>
                 <a:spcPts val="1000"/>
               </a:spcAft>
+              <a:buSzPct val="100000"/>
               <a:buChar char="•"/>
               <a:lnSpc>
                 <a:spcPts val="2200"/>
@@ -4922,10 +4948,12 @@
             </a:r>
           </a:p>
           <a:p>
-            <a:pPr>
+            <a:pPr lvl="0" marL="457200" indent="-228600">
+              <a:buFont typeface="Calibri"/>
               <a:spcAft>
                 <a:spcPts val="1000"/>
               </a:spcAft>
+              <a:buSzPct val="100000"/>
               <a:buChar char="•"/>
               <a:lnSpc>
                 <a:spcPts val="2200"/>
@@ -4942,10 +4970,12 @@
             </a:r>
           </a:p>
           <a:p>
-            <a:pPr>
+            <a:pPr lvl="0" marL="457200" indent="-228600">
+              <a:buFont typeface="Calibri"/>
               <a:spcAft>
                 <a:spcPts val="1000"/>
               </a:spcAft>
+              <a:buSzPct val="100000"/>
               <a:buChar char="•"/>
               <a:lnSpc>
                 <a:spcPts val="2200"/>
@@ -4962,10 +4992,12 @@
             </a:r>
           </a:p>
           <a:p>
-            <a:pPr>
+            <a:pPr lvl="0" marL="457200" indent="-228600">
+              <a:buFont typeface="Calibri"/>
               <a:spcAft>
                 <a:spcPts val="1000"/>
               </a:spcAft>
+              <a:buSzPct val="100000"/>
               <a:buChar char="•"/>
               <a:lnSpc>
                 <a:spcPts val="2200"/>
@@ -5355,10 +5387,12 @@
           </a:bodyPr>
           <a:lstStyle/>
           <a:p>
-            <a:pPr>
+            <a:pPr lvl="0" marL="457200" indent="-228600">
+              <a:buFont typeface="Calibri"/>
               <a:spcAft>
                 <a:spcPts val="1000"/>
               </a:spcAft>
+              <a:buSzPct val="100000"/>
               <a:buChar char="•"/>
               <a:lnSpc>
                 <a:spcPts val="2200"/>
@@ -5375,10 +5409,12 @@
             </a:r>
           </a:p>
           <a:p>
-            <a:pPr>
+            <a:pPr lvl="0" marL="457200" indent="-228600">
+              <a:buFont typeface="Calibri"/>
               <a:spcAft>
                 <a:spcPts val="1000"/>
               </a:spcAft>
+              <a:buSzPct val="100000"/>
               <a:buChar char="•"/>
               <a:lnSpc>
                 <a:spcPts val="2200"/>
@@ -5395,10 +5431,12 @@
             </a:r>
           </a:p>
           <a:p>
-            <a:pPr>
+            <a:pPr lvl="0" marL="457200" indent="-228600">
+              <a:buFont typeface="Calibri"/>
               <a:spcAft>
                 <a:spcPts val="1000"/>
               </a:spcAft>
+              <a:buSzPct val="100000"/>
               <a:buChar char="•"/>
               <a:lnSpc>
                 <a:spcPts val="2200"/>
@@ -5415,10 +5453,12 @@
             </a:r>
           </a:p>
           <a:p>
-            <a:pPr>
+            <a:pPr lvl="0" marL="457200" indent="-228600">
+              <a:buFont typeface="Calibri"/>
               <a:spcAft>
                 <a:spcPts val="1000"/>
               </a:spcAft>
+              <a:buSzPct val="100000"/>
               <a:buChar char="•"/>
               <a:lnSpc>
                 <a:spcPts val="2200"/>
@@ -5435,10 +5475,12 @@
             </a:r>
           </a:p>
           <a:p>
-            <a:pPr>
+            <a:pPr lvl="0" marL="457200" indent="-228600">
+              <a:buFont typeface="Calibri"/>
               <a:spcAft>
                 <a:spcPts val="1000"/>
               </a:spcAft>
+              <a:buSzPct val="100000"/>
               <a:buChar char="•"/>
               <a:lnSpc>
                 <a:spcPts val="2200"/>
@@ -6018,10 +6060,12 @@
           </a:bodyPr>
           <a:lstStyle/>
           <a:p>
-            <a:pPr>
+            <a:pPr lvl="0" marL="457200" indent="-228600">
+              <a:buFont typeface="Calibri"/>
               <a:spcAft>
                 <a:spcPts val="1000"/>
               </a:spcAft>
+              <a:buSzPct val="100000"/>
               <a:buChar char="•"/>
               <a:lnSpc>
                 <a:spcPts val="2200"/>
@@ -6038,10 +6082,12 @@
             </a:r>
           </a:p>
           <a:p>
-            <a:pPr>
+            <a:pPr lvl="0" marL="457200" indent="-228600">
+              <a:buFont typeface="Calibri"/>
               <a:spcAft>
                 <a:spcPts val="1000"/>
               </a:spcAft>
+              <a:buSzPct val="100000"/>
               <a:buChar char="•"/>
               <a:lnSpc>
                 <a:spcPts val="2200"/>
@@ -6058,10 +6104,12 @@
             </a:r>
           </a:p>
           <a:p>
-            <a:pPr>
+            <a:pPr lvl="0" marL="457200" indent="-228600">
+              <a:buFont typeface="Calibri"/>
               <a:spcAft>
                 <a:spcPts val="1000"/>
               </a:spcAft>
+              <a:buSzPct val="100000"/>
               <a:buChar char="•"/>
               <a:lnSpc>
                 <a:spcPts val="2200"/>
